--- a/content/materials/Reading_the_Radar_slides.pptx
+++ b/content/materials/Reading_the_Radar_slides.pptx
@@ -5999,30 +5999,6 @@
           <a:chExt cx="0" cy="0"/>
         </a:xfrm>
       </p:grpSpPr>
-      <p:pic>
-        <p:nvPicPr>
-          <p:cNvPr id="3" name="Image 0" descr="preencoded.png"/>
-          <p:cNvPicPr>
-            <a:picLocks noChangeAspect="1"/>
-          </p:cNvPicPr>
-          <p:nvPr/>
-        </p:nvPicPr>
-        <p:blipFill>
-          <a:blip r:embed="rId3"/>
-          <a:stretch>
-            <a:fillRect/>
-          </a:stretch>
-        </p:blipFill>
-        <p:spPr>
-          <a:xfrm>
-            <a:off x="690372" y="525780"/>
-            <a:ext cx="283464" cy="283464"/>
-          </a:xfrm>
-          <a:prstGeom prst="rect">
-            <a:avLst/>
-          </a:prstGeom>
-        </p:spPr>
-      </p:pic>
       <p:sp>
         <p:nvSpPr>
           <p:cNvPr id="4" name="Text 1"/>
@@ -9481,30 +9457,6 @@
           <a:chExt cx="0" cy="0"/>
         </a:xfrm>
       </p:grpSpPr>
-      <p:pic>
-        <p:nvPicPr>
-          <p:cNvPr id="3" name="Image 0" descr="preencoded.png"/>
-          <p:cNvPicPr>
-            <a:picLocks noChangeAspect="1"/>
-          </p:cNvPicPr>
-          <p:nvPr/>
-        </p:nvPicPr>
-        <p:blipFill>
-          <a:blip r:embed="rId3"/>
-          <a:stretch>
-            <a:fillRect/>
-          </a:stretch>
-        </p:blipFill>
-        <p:spPr>
-          <a:xfrm>
-            <a:off x="690372" y="525780"/>
-            <a:ext cx="283464" cy="283464"/>
-          </a:xfrm>
-          <a:prstGeom prst="rect">
-            <a:avLst/>
-          </a:prstGeom>
-        </p:spPr>
-      </p:pic>
       <p:sp>
         <p:nvSpPr>
           <p:cNvPr id="4" name="Text 1"/>
@@ -12615,30 +12567,6 @@
           <a:chExt cx="0" cy="0"/>
         </a:xfrm>
       </p:grpSpPr>
-      <p:pic>
-        <p:nvPicPr>
-          <p:cNvPr id="3" name="Image 0" descr="preencoded.png"/>
-          <p:cNvPicPr>
-            <a:picLocks noChangeAspect="1"/>
-          </p:cNvPicPr>
-          <p:nvPr/>
-        </p:nvPicPr>
-        <p:blipFill>
-          <a:blip r:embed="rId3"/>
-          <a:stretch>
-            <a:fillRect/>
-          </a:stretch>
-        </p:blipFill>
-        <p:spPr>
-          <a:xfrm>
-            <a:off x="690372" y="525780"/>
-            <a:ext cx="283464" cy="283464"/>
-          </a:xfrm>
-          <a:prstGeom prst="rect">
-            <a:avLst/>
-          </a:prstGeom>
-        </p:spPr>
-      </p:pic>
       <p:sp>
         <p:nvSpPr>
           <p:cNvPr id="4" name="Text 1"/>
@@ -16323,36 +16251,6 @@
           <a:chExt cx="0" cy="0"/>
         </a:xfrm>
       </p:grpSpPr>
-      <p:pic>
-        <p:nvPicPr>
-          <p:cNvPr id="3" name="Image 0" descr="preencoded.png">
-            <a:extLst>
-              <a:ext uri="{FF2B5EF4-FFF2-40B4-BE49-F238E27FC236}">
-                <a16:creationId xmlns:a16="http://schemas.microsoft.com/office/drawing/2014/main" id="{9EF7A8EF-277B-A0C6-23FB-93500D0B1731}"/>
-              </a:ext>
-            </a:extLst>
-          </p:cNvPr>
-          <p:cNvPicPr>
-            <a:picLocks noChangeAspect="1"/>
-          </p:cNvPicPr>
-          <p:nvPr/>
-        </p:nvPicPr>
-        <p:blipFill>
-          <a:blip r:embed="rId3"/>
-          <a:stretch>
-            <a:fillRect/>
-          </a:stretch>
-        </p:blipFill>
-        <p:spPr>
-          <a:xfrm>
-            <a:off x="690372" y="525780"/>
-            <a:ext cx="283464" cy="283464"/>
-          </a:xfrm>
-          <a:prstGeom prst="rect">
-            <a:avLst/>
-          </a:prstGeom>
-        </p:spPr>
-      </p:pic>
       <p:sp>
         <p:nvSpPr>
           <p:cNvPr id="4" name="Text 1">
@@ -19503,30 +19401,6 @@
           <a:chExt cx="0" cy="0"/>
         </a:xfrm>
       </p:grpSpPr>
-      <p:pic>
-        <p:nvPicPr>
-          <p:cNvPr id="3" name="Image 0" descr="preencoded.png"/>
-          <p:cNvPicPr>
-            <a:picLocks noChangeAspect="1"/>
-          </p:cNvPicPr>
-          <p:nvPr/>
-        </p:nvPicPr>
-        <p:blipFill>
-          <a:blip r:embed="rId3"/>
-          <a:stretch>
-            <a:fillRect/>
-          </a:stretch>
-        </p:blipFill>
-        <p:spPr>
-          <a:xfrm>
-            <a:off x="690372" y="525780"/>
-            <a:ext cx="283464" cy="283464"/>
-          </a:xfrm>
-          <a:prstGeom prst="rect">
-            <a:avLst/>
-          </a:prstGeom>
-        </p:spPr>
-      </p:pic>
       <p:sp>
         <p:nvSpPr>
           <p:cNvPr id="4" name="Text 1"/>
